--- a/week-01/presentations/ppts/day-05-data-driven-problem-framing.pptx
+++ b/week-01/presentations/ppts/day-05-data-driven-problem-framing.pptx
@@ -6999,52 +6999,7 @@
             </a:pPr>
             <a:r>
               <a:rPr/>
-              <a:t>Who — [persona role + context]</a:t>
-            </a:r>
-          </a:p>
-          <a:p>
-            <a:pPr lvl="0" indent="0" marL="0">
-              <a:buNone/>
-            </a:pPr>
-            <a:r>
-              <a:rPr/>
-              <a:t>Currently — [observed behavior, with frequency]</a:t>
-            </a:r>
-          </a:p>
-          <a:p>
-            <a:pPr lvl="0" indent="0" marL="0">
-              <a:buNone/>
-            </a:pPr>
-            <a:r>
-              <a:rPr/>
-              <a:t>Which causes — [measurable consequence]</a:t>
-            </a:r>
-          </a:p>
-          <a:p>
-            <a:pPr lvl="0" indent="0" marL="0">
-              <a:buNone/>
-            </a:pPr>
-            <a:r>
-              <a:rPr/>
-              <a:t>Because — [root cause, from 5 Whys]</a:t>
-            </a:r>
-          </a:p>
-          <a:p>
-            <a:pPr lvl="0" indent="0" marL="0">
-              <a:buNone/>
-            </a:pPr>
-            <a:r>
-              <a:rPr/>
-              <a:t>We know this because — [evidence, tagged]</a:t>
-            </a:r>
-          </a:p>
-          <a:p>
-            <a:pPr lvl="0" indent="0" marL="0">
-              <a:buNone/>
-            </a:pPr>
-            <a:r>
-              <a:rPr/>
-              <a:t>Success looks like — [the change we’d see if the problem is solved]</a:t>
+              <a:t>Who — [persona role + context] Currently — [observed behavior, with frequency] Which causes — [measurable consequence] Because — [root cause, from 5 Whys] We know this because — [evidence, tagged] Success looks like — [the change we’d see if the problem is solved]</a:t>
             </a:r>
           </a:p>
           <a:p>
@@ -7125,52 +7080,7 @@
             </a:pPr>
             <a:r>
               <a:rPr/>
-              <a:t>Who — Lead Dispatchers at 50–200 tech HVAC companies</a:t>
-            </a:r>
-          </a:p>
-          <a:p>
-            <a:pPr lvl="0" indent="0" marL="0">
-              <a:buNone/>
-            </a:pPr>
-            <a:r>
-              <a:rPr/>
-              <a:t>Currently — Spend an average of 45 minutes post-shift reconciling paper tickets, truck stock, and timecards (observed, 6 of 8 ride-alongs)</a:t>
-            </a:r>
-          </a:p>
-          <a:p>
-            <a:pPr lvl="0" indent="0" marL="0">
-              <a:buNone/>
-            </a:pPr>
-            <a:r>
-              <a:rPr/>
-              <a:t>Which causes — ~3.75 unpaid hours per dispatcher per week and a measured 22% turnover in the role (reported, HR data from 3 customers)</a:t>
-            </a:r>
-          </a:p>
-          <a:p>
-            <a:pPr lvl="0" indent="0" marL="0">
-              <a:buNone/>
-            </a:pPr>
-            <a:r>
-              <a:rPr/>
-              <a:t>Because — Ticket submission requires connectivity techs don’t have at the last job, so paper becomes the path of least resistance (5 Whys root)</a:t>
-            </a:r>
-          </a:p>
-          <a:p>
-            <a:pPr lvl="0" indent="0" marL="0">
-              <a:buNone/>
-            </a:pPr>
-            <a:r>
-              <a:rPr/>
-              <a:t>We know this because — Observed 6 ride-alongs; Reported 4 interviews; Inferred turnover causality</a:t>
-            </a:r>
-          </a:p>
-          <a:p>
-            <a:pPr lvl="0" indent="0" marL="0">
-              <a:buNone/>
-            </a:pPr>
-            <a:r>
-              <a:rPr/>
-              <a:t>Success looks like — Post-shift reconcile under 10 minutes for 80% of dispatchers within 6 months</a:t>
+              <a:t>Who — Lead Dispatchers at 50–200 tech HVAC companies Currently — Spend an average of 45 minutes post-shift reconciling paper tickets, truck stock, and timecards (observed, 6 of 8 ride-alongs) Which causes — ~3.75 unpaid hours per dispatcher per week and a measured 22% turnover in the role (reported, HR data from 3 customers) Because — Ticket submission requires connectivity techs don’t have at the last job, so paper becomes the path of least resistance (5 Whys root) We know this because — Observed 6 ride-alongs; Reported 4 interviews; Inferred turnover causality Success looks like — Post-shift reconcile under 10 minutes for 80% of dispatchers within 6 months</a:t>
             </a:r>
           </a:p>
         </p:txBody>

--- a/week-01/presentations/ppts/day-05-data-driven-problem-framing.pptx
+++ b/week-01/presentations/ppts/day-05-data-driven-problem-framing.pptx
@@ -5322,6 +5322,15 @@
               <a:t>The discipline: Every claim in the problem statement appears in the evidence log. Nothing floats unsupported.</a:t>
             </a:r>
           </a:p>
+          <a:p>
+            <a:pPr lvl="0" indent="0" marL="0">
+              <a:buNone/>
+            </a:pPr>
+            <a:r>
+              <a:rPr/>
+              <a:t>This one-page brief is your Week 3 product requirements document (PRD) input.</a:t>
+            </a:r>
+          </a:p>
         </p:txBody>
       </p:sp>
     </p:spTree>
@@ -6417,7 +6426,7 @@
             </a:pPr>
             <a:r>
               <a:rPr/>
-              <a:t>Pain map → operational signals &amp; KPIs</a:t>
+              <a:t>Pain map → operational signals &amp; key performance indicators (KPIs)</a:t>
             </a:r>
           </a:p>
           <a:p>

--- a/week-01/presentations/ppts/day-05-data-driven-problem-framing.pptx
+++ b/week-01/presentations/ppts/day-05-data-driven-problem-framing.pptx
@@ -5394,6 +5394,24 @@
         <p:txBody>
           <a:bodyPr/>
           <a:lstStyle/>
+          <a:p>
+            <a:pPr lvl="0" indent="0">
+              <a:buNone/>
+            </a:pPr>
+            <a:r>
+              <a:rPr>
+                <a:latin typeface="Courier"/>
+              </a:rPr>
+              <a:t>Role: Senior engineering lead reading a problem statement I intend to scope against.
+Context: [paste problem statement + evidence log]
+Constraints:
+- Do not rewrite. Ask the questions you would ask me in a scoping meeting.
+- Rank your questions by how much they'd change your estimate if unanswered.
+- Flag any claim that is inferred or AI-generated that you'd want upgraded first.
+Format: Numbered list of questions, ranked.
+</a:t>
+            </a:r>
+          </a:p>
           <a:p>
             <a:pPr lvl="0" indent="0" marL="0">
               <a:buNone/>

--- a/week-01/presentations/ppts/day-05-data-driven-problem-framing.pptx
+++ b/week-01/presentations/ppts/day-05-data-driven-problem-framing.pptx
@@ -708,7 +708,7 @@
             </a:pPr>
             <a:r>
               <a:rPr/>
-              <a:t>Some triads will want to have AI rewrite. Don’t let them — they’ll lose the thinking that makes the readout defensible.</a:t>
+              <a:t>Some quads will want to have AI rewrite. Don’t let them — they’ll lose the thinking that makes the readout defensible.</a:t>
             </a:r>
           </a:p>
         </p:txBody>
@@ -954,7 +954,7 @@
             </a:pPr>
             <a:r>
               <a:rPr/>
-              <a:t>The no-defend norm is hard but keeps readouts productive. Re-invoke it before each triad starts.</a:t>
+              <a:t>The no-defend norm is hard but keeps readouts productive. Re-invoke it before each quad starts.</a:t>
             </a:r>
           </a:p>
         </p:txBody>
@@ -1118,7 +1118,7 @@
             </a:pPr>
             <a:r>
               <a:rPr/>
-              <a:t>The big moment of Week 1. Keep clock-discipline tight: every triad gets the full window, and we never cut readout time for catch-up.</a:t>
+              <a:t>The big moment of Week 1. Keep clock-discipline tight: every quad gets the full window, and we never cut readout time for catch-up.</a:t>
             </a:r>
           </a:p>
         </p:txBody>
@@ -1200,7 +1200,7 @@
             </a:pPr>
             <a:r>
               <a:rPr/>
-              <a:t>The rubric is in the Week 1 README. Make sure every triad has it during readouts.</a:t>
+              <a:t>The rubric is in the Week 1 README. Make sure every quad has it during readouts.</a:t>
             </a:r>
           </a:p>
         </p:txBody>
@@ -1282,7 +1282,7 @@
             </a:pPr>
             <a:r>
               <a:rPr/>
-              <a:t>Facilitator keeps the clock tight. Going long on early triads squeezes later ones — unfair.</a:t>
+              <a:t>Facilitator keeps the clock tight. Going long on early quads squeezes later ones — unfair.</a:t>
             </a:r>
           </a:p>
         </p:txBody>
@@ -1610,7 +1610,7 @@
             </a:pPr>
             <a:r>
               <a:rPr/>
-              <a:t>Friday cadence is heavier on readouts. The last 90 minutes is full-cohort time — hold the clock so every triad gets their full window.</a:t>
+              <a:t>Friday cadence is heavier on readouts. The last 90 minutes is full-cohort time — hold the clock so every quad gets their full window.</a:t>
             </a:r>
           </a:p>
         </p:txBody>
@@ -2020,7 +2020,7 @@
             </a:pPr>
             <a:r>
               <a:rPr/>
-              <a:t>Within-triad peer read (not cross-triad yet) catches the obvious stuff before Activity 2.</a:t>
+              <a:t>Within-quad peer read (not cross-quad yet) catches the obvious stuff before Activity 2.</a:t>
             </a:r>
           </a:p>
         </p:txBody>
@@ -5418,7 +5418,7 @@
             </a:pPr>
             <a:r>
               <a:rPr/>
-              <a:t>Rule: AI can challenge the statement. AI does not get to write it. Ownership stays with the triad.</a:t>
+              <a:t>Rule: AI can challenge the statement. AI does not get to write it. Ownership stays with the quad.</a:t>
             </a:r>
           </a:p>
         </p:txBody>
@@ -5493,16 +5493,16 @@
             </a:pPr>
             <a:r>
               <a:rPr b="1"/>
-              <a:t>Triads • 45 minutes</a:t>
-            </a:r>
-          </a:p>
-          <a:p>
-            <a:pPr lvl="0" indent="0" marL="0">
-              <a:buNone/>
-            </a:pPr>
-            <a:r>
-              <a:rPr/>
-              <a:t>Run the pressure-test prompt. Then, as a triad:</a:t>
+              <a:t>Quads • 45 minutes</a:t>
+            </a:r>
+          </a:p>
+          <a:p>
+            <a:pPr lvl="0" indent="0" marL="0">
+              <a:buNone/>
+            </a:pPr>
+            <a:r>
+              <a:rPr/>
+              <a:t>Run the pressure-test prompt. Then, as a quad:</a:t>
             </a:r>
           </a:p>
           <a:p>
@@ -5805,16 +5805,16 @@
             </a:pPr>
             <a:r>
               <a:rPr b="1"/>
-              <a:t>Paired triads • 45 minutes</a:t>
-            </a:r>
-          </a:p>
-          <a:p>
-            <a:pPr lvl="0" indent="0" marL="0">
-              <a:buNone/>
-            </a:pPr>
-            <a:r>
-              <a:rPr/>
-              <a:t>Triads pair. Each does a full timed 10-minute readout to the other, with stopwatch.</a:t>
+              <a:t>Paired quads • 45 minutes</a:t>
+            </a:r>
+          </a:p>
+          <a:p>
+            <a:pPr lvl="0" indent="0" marL="0">
+              <a:buNone/>
+            </a:pPr>
+            <a:r>
+              <a:rPr/>
+              <a:t>Quads pair. Each does a full timed 10-minute readout to the other, with stopwatch.</a:t>
             </a:r>
           </a:p>
           <a:p>
@@ -5841,7 +5841,7 @@
             </a:pPr>
             <a:r>
               <a:rPr/>
-              <a:t>Compare that sentence to what the triad intended to convey</a:t>
+              <a:t>Compare that sentence to what the quad intended to convey</a:t>
             </a:r>
           </a:p>
           <a:p>
@@ -6105,7 +6105,7 @@
             </a:pPr>
             <a:r>
               <a:rPr/>
-              <a:t>Each triad gets a score sheet from every peer triad + the instructor. Scores plus one strength and one suggestion.</a:t>
+              <a:t>Each quad gets a score sheet from every peer quad + the instructor. Scores plus one strength and one suggestion.</a:t>
             </a:r>
           </a:p>
         </p:txBody>
@@ -6180,34 +6180,34 @@
             </a:pPr>
             <a:r>
               <a:rPr b="1"/>
-              <a:t>Full cohort • 10 min per triad + 3 min score-sheet writing</a:t>
-            </a:r>
-          </a:p>
-          <a:p>
-            <a:pPr lvl="0" indent="0" marL="0">
-              <a:buNone/>
-            </a:pPr>
-            <a:r>
-              <a:rPr/>
-              <a:t>Order is random (draw triad names). Between triads, a 3-minute quiet block for written feedback.</a:t>
-            </a:r>
-          </a:p>
-          <a:p>
-            <a:pPr lvl="0" indent="0" marL="0">
-              <a:buNone/>
-            </a:pPr>
-            <a:r>
-              <a:rPr/>
-              <a:t>Presenting triad: follow the rehearsal structure</a:t>
-            </a:r>
-          </a:p>
-          <a:p>
-            <a:pPr lvl="0" indent="0" marL="0">
-              <a:buNone/>
-            </a:pPr>
-            <a:r>
-              <a:rPr/>
-              <a:t>Audience triads: questions only, no defending</a:t>
+              <a:t>Full cohort • 10 min per quad + 3 min score-sheet writing</a:t>
+            </a:r>
+          </a:p>
+          <a:p>
+            <a:pPr lvl="0" indent="0" marL="0">
+              <a:buNone/>
+            </a:pPr>
+            <a:r>
+              <a:rPr/>
+              <a:t>Order is random (draw quad names). Between quads, a 3-minute quiet block for written feedback.</a:t>
+            </a:r>
+          </a:p>
+          <a:p>
+            <a:pPr lvl="0" indent="0" marL="0">
+              <a:buNone/>
+            </a:pPr>
+            <a:r>
+              <a:rPr/>
+              <a:t>Presenting quad: follow the rehearsal structure</a:t>
+            </a:r>
+          </a:p>
+          <a:p>
+            <a:pPr lvl="0" indent="0" marL="0">
+              <a:buNone/>
+            </a:pPr>
+            <a:r>
+              <a:rPr/>
+              <a:t>Audience quads: questions only, no defending</a:t>
             </a:r>
           </a:p>
           <a:p>
@@ -6225,7 +6225,7 @@
             </a:pPr>
             <a:r>
               <a:rPr/>
-              <a:t>⏱ Plan ~80–90 min for 6 triads</a:t>
+              <a:t>⏱ Plan ~80–90 min for 6 quads</a:t>
             </a:r>
           </a:p>
         </p:txBody>
@@ -6381,7 +6381,7 @@
             </a:pPr>
             <a:r>
               <a:rPr/>
-              <a:t>Prompt Pattern Library (triad)</a:t>
+              <a:t>Prompt Pattern Library (quad)</a:t>
             </a:r>
           </a:p>
           <a:p>
@@ -7407,7 +7407,7 @@
             </a:pPr>
             <a:r>
               <a:rPr b="1"/>
-              <a:t>Triads • 45 minutes</a:t>
+              <a:t>Quads • 45 minutes</a:t>
             </a:r>
           </a:p>
           <a:p>
@@ -7452,7 +7452,7 @@
             </a:pPr>
             <a:r>
               <a:rPr/>
-              <a:t>⏱ 20 min draft · 15 min failure-mode audit · 10 min peer-within-triad read</a:t>
+              <a:t>⏱ 20 min draft · 15 min failure-mode audit · 10 min peer-within-quad read</a:t>
             </a:r>
           </a:p>
         </p:txBody>

--- a/week-01/presentations/ppts/day-05-data-driven-problem-framing.pptx
+++ b/week-01/presentations/ppts/day-05-data-driven-problem-framing.pptx
@@ -5493,7 +5493,7 @@
             </a:pPr>
             <a:r>
               <a:rPr b="1"/>
-              <a:t>Quads • 45 minutes</a:t>
+              <a:t>Quads • 50 minutes</a:t>
             </a:r>
           </a:p>
           <a:p>
@@ -5805,7 +5805,7 @@
             </a:pPr>
             <a:r>
               <a:rPr b="1"/>
-              <a:t>Paired quads • 45 minutes</a:t>
+              <a:t>Paired quads • 50 minutes</a:t>
             </a:r>
           </a:p>
           <a:p>

--- a/week-01/presentations/ppts/day-05-data-driven-problem-framing.pptx
+++ b/week-01/presentations/ppts/day-05-data-driven-problem-framing.pptx
@@ -5538,7 +5538,7 @@
             </a:pPr>
             <a:r>
               <a:rPr/>
-              <a:t>⏱ 10 min run prompt · 25 min respond · 10 min revise brief</a:t>
+              <a:t>⏱ 10 min run prompt · 30 min respond · 10 min revise brief</a:t>
             </a:r>
           </a:p>
         </p:txBody>
@@ -5850,7 +5850,7 @@
             </a:pPr>
             <a:r>
               <a:rPr/>
-              <a:t>⏱ 10 min each direction · 25 min debrief</a:t>
+              <a:t>⏱ 10 min each direction · 30 min debrief</a:t>
             </a:r>
           </a:p>
         </p:txBody>
